--- a/slides/S6_slides.pptx
+++ b/slides/S6_slides.pptx
@@ -3126,7 +3126,7 @@
         <p:spPr>
           <a:xfrm>
             <a:off x="822960" y="2468880"/>
-            <a:ext cx="10545775" cy="1280160"/>
+            <a:ext cx="10545775" cy="802640"/>
           </a:xfrm>
           <a:prstGeom prst="rect">
             <a:avLst/>
@@ -3164,7 +3164,7 @@
         </p:nvSpPr>
         <p:spPr>
           <a:xfrm>
-            <a:off x="822960" y="3657600"/>
+            <a:off x="822960" y="3500120"/>
             <a:ext cx="10545775" cy="914400"/>
           </a:xfrm>
           <a:prstGeom prst="rect">
@@ -3458,7 +3458,7 @@
         <p:spPr>
           <a:xfrm>
             <a:off x="822960" y="1188720"/>
-            <a:ext cx="10545775" cy="1645920"/>
+            <a:ext cx="10545775" cy="429260"/>
           </a:xfrm>
           <a:prstGeom prst="rect">
             <a:avLst/>
@@ -3496,7 +3496,7 @@
         </p:nvSpPr>
         <p:spPr>
           <a:xfrm>
-            <a:off x="822960" y="2834640"/>
+            <a:off x="822960" y="1938020"/>
             <a:ext cx="10545775" cy="1280160"/>
           </a:xfrm>
           <a:prstGeom prst="rect">
@@ -3958,7 +3958,7 @@
         <p:spPr>
           <a:xfrm>
             <a:off x="822960" y="1188720"/>
-            <a:ext cx="10545775" cy="1645920"/>
+            <a:ext cx="10545775" cy="429260"/>
           </a:xfrm>
           <a:prstGeom prst="rect">
             <a:avLst/>
@@ -3996,8 +3996,8 @@
         </p:nvSpPr>
         <p:spPr>
           <a:xfrm>
-            <a:off x="822960" y="2834640"/>
-            <a:ext cx="10545775" cy="2194560"/>
+            <a:off x="822960" y="1938020"/>
+            <a:ext cx="10545775" cy="458470"/>
           </a:xfrm>
           <a:prstGeom prst="rect">
             <a:avLst/>
@@ -4459,7 +4459,7 @@
         <p:spPr>
           <a:xfrm>
             <a:off x="822960" y="1188720"/>
-            <a:ext cx="10545775" cy="1645920"/>
+            <a:ext cx="10545775" cy="429260"/>
           </a:xfrm>
           <a:prstGeom prst="rect">
             <a:avLst/>
@@ -4484,7 +4484,7 @@
                 </a:solidFill>
                 <a:latin typeface="Helvetica"/>
               </a:rPr>
-              <a:t>Seven opsins and a rhodopsin.</a:t>
+              <a:t>Five cone opsins, two rhodopsins — and one honest gene.</a:t>
             </a:r>
           </a:p>
         </p:txBody>
@@ -4497,8 +4497,8 @@
         </p:nvSpPr>
         <p:spPr>
           <a:xfrm>
-            <a:off x="822960" y="2834640"/>
-            <a:ext cx="10545775" cy="2194560"/>
+            <a:off x="822960" y="1938020"/>
+            <a:ext cx="10545775" cy="2750820"/>
           </a:xfrm>
           <a:prstGeom prst="rect">
             <a:avLst/>
@@ -4523,7 +4523,7 @@
                 </a:solidFill>
                 <a:latin typeface="Helvetica"/>
               </a:rPr>
-              <a:t>Light is electromagnetic radiation, so photoreceptor genes are annotated</a:t>
+              <a:t>Light is electromagnetic radiation, so photoreceptor genes get annotated</a:t>
             </a:r>
           </a:p>
           <a:p>
@@ -4539,7 +4539,7 @@
                 </a:solidFill>
                 <a:latin typeface="Helvetica"/>
               </a:rPr>
-              <a:t>to a radiation term. The statistics are correct. The label is misleading.</a:t>
+              <a:t>to a radiation term. The statistics are correct; the label misleads.</a:t>
             </a:r>
           </a:p>
           <a:p>
@@ -4555,6 +4555,22 @@
                 </a:solidFill>
                 <a:latin typeface="Helvetica"/>
               </a:rPr>
+              <a:t>The same seven drive 'response to light stimulus' — one finding, counted twice.</a:t>
+            </a:r>
+          </a:p>
+          <a:p>
+            <a:pPr algn="l">
+              <a:spcAft>
+                <a:spcPts val="1200"/>
+              </a:spcAft>
+            </a:pPr>
+            <a:r>
+              <a:rPr sz="1900" b="0" i="0">
+                <a:solidFill>
+                  <a:srgbClr val="666666"/>
+                </a:solidFill>
+                <a:latin typeface="Helvetica"/>
+              </a:rPr>
               <a:t/>
             </a:r>
           </a:p>
@@ -4571,7 +4587,7 @@
                 </a:solidFill>
                 <a:latin typeface="Helvetica"/>
               </a:rPr>
-              <a:t>The same genes also drive 'response to light stimulus' — one finding,</a:t>
+              <a:t>The eighth, bbc3, is PUMA, and it really is a DNA-damage gene.</a:t>
             </a:r>
           </a:p>
           <a:p>
@@ -4587,7 +4603,7 @@
                 </a:solidFill>
                 <a:latin typeface="Helvetica"/>
               </a:rPr>
-              <a:t>counted twice.</a:t>
+              <a:t>One out of eight, arriving with seven that do not belong, is not evidence.</a:t>
             </a:r>
           </a:p>
         </p:txBody>
@@ -5247,7 +5263,7 @@
         <p:spPr>
           <a:xfrm>
             <a:off x="822960" y="1188720"/>
-            <a:ext cx="10545775" cy="1645920"/>
+            <a:ext cx="10545775" cy="429260"/>
           </a:xfrm>
           <a:prstGeom prst="rect">
             <a:avLst/>
@@ -5285,8 +5301,8 @@
         </p:nvSpPr>
         <p:spPr>
           <a:xfrm>
-            <a:off x="822960" y="2834640"/>
-            <a:ext cx="10545775" cy="2194560"/>
+            <a:off x="822960" y="1938020"/>
+            <a:ext cx="10545775" cy="2292350"/>
           </a:xfrm>
           <a:prstGeom prst="rect">
             <a:avLst/>
@@ -5715,7 +5731,7 @@
         <p:spPr>
           <a:xfrm>
             <a:off x="822960" y="1188720"/>
-            <a:ext cx="10545775" cy="1645920"/>
+            <a:ext cx="10545775" cy="429260"/>
           </a:xfrm>
           <a:prstGeom prst="rect">
             <a:avLst/>
@@ -5753,8 +5769,8 @@
         </p:nvSpPr>
         <p:spPr>
           <a:xfrm>
-            <a:off x="822960" y="2834640"/>
-            <a:ext cx="10545775" cy="2194560"/>
+            <a:off x="822960" y="1938020"/>
+            <a:ext cx="10545775" cy="458470"/>
           </a:xfrm>
           <a:prstGeom prst="rect">
             <a:avLst/>
@@ -6383,7 +6399,7 @@
         <p:spPr>
           <a:xfrm>
             <a:off x="822960" y="1188720"/>
-            <a:ext cx="10545775" cy="1645920"/>
+            <a:ext cx="10545775" cy="429260"/>
           </a:xfrm>
           <a:prstGeom prst="rect">
             <a:avLst/>
@@ -6421,8 +6437,8 @@
         </p:nvSpPr>
         <p:spPr>
           <a:xfrm>
-            <a:off x="822960" y="2834640"/>
-            <a:ext cx="10545775" cy="2194560"/>
+            <a:off x="822960" y="1938020"/>
+            <a:ext cx="10545775" cy="1833880"/>
           </a:xfrm>
           <a:prstGeom prst="rect">
             <a:avLst/>
@@ -6508,7 +6524,7 @@
         </p:nvSpPr>
         <p:spPr>
           <a:xfrm>
-            <a:off x="822960" y="4572000"/>
+            <a:off x="822960" y="4046220"/>
             <a:ext cx="10545775" cy="1280160"/>
           </a:xfrm>
           <a:prstGeom prst="rect">

--- a/slides/S6_slides.pptx
+++ b/slides/S6_slides.pptx
@@ -4555,7 +4555,7 @@
                 </a:solidFill>
                 <a:latin typeface="Helvetica"/>
               </a:rPr>
-              <a:t>The same seven drive 'response to light stimulus' — one finding, counted twice.</a:t>
+              <a:t>The seven also sit in 'response to light stimulus', mixed with clock genes.</a:t>
             </a:r>
           </a:p>
           <a:p>

--- a/slides/S6_slides.pptx
+++ b/slides/S6_slides.pptx
@@ -3497,7 +3497,7 @@
         <p:spPr>
           <a:xfrm>
             <a:off x="822960" y="1938020"/>
-            <a:ext cx="10545775" cy="1280160"/>
+            <a:ext cx="10545775" cy="1403350"/>
           </a:xfrm>
           <a:prstGeom prst="rect">
             <a:avLst/>
@@ -3512,7 +3512,7 @@
           <a:p>
             <a:pPr algn="l">
               <a:spcAft>
-                <a:spcPts val="1000"/>
+                <a:spcPts val="0"/>
               </a:spcAft>
             </a:pPr>
             <a:r>
@@ -3528,7 +3528,7 @@
           <a:p>
             <a:pPr algn="l">
               <a:spcAft>
-                <a:spcPts val="1000"/>
+                <a:spcPts val="0"/>
               </a:spcAft>
             </a:pPr>
             <a:r>
@@ -3544,7 +3544,7 @@
           <a:p>
             <a:pPr algn="l">
               <a:spcAft>
-                <a:spcPts val="1000"/>
+                <a:spcPts val="0"/>
               </a:spcAft>
             </a:pPr>
             <a:r>
@@ -3560,7 +3560,7 @@
           <a:p>
             <a:pPr algn="l">
               <a:spcAft>
-                <a:spcPts val="1000"/>
+                <a:spcPts val="0"/>
               </a:spcAft>
             </a:pPr>
             <a:r>
@@ -3576,7 +3576,7 @@
           <a:p>
             <a:pPr algn="l">
               <a:spcAft>
-                <a:spcPts val="1000"/>
+                <a:spcPts val="0"/>
               </a:spcAft>
             </a:pPr>
             <a:r>
@@ -4484,7 +4484,7 @@
                 </a:solidFill>
                 <a:latin typeface="Helvetica"/>
               </a:rPr>
-              <a:t>Five cone opsins, two rhodopsins — and one honest gene.</a:t>
+              <a:t>Four cone opsins, two rhodopsins, a melanopsin — and one honest gene.</a:t>
             </a:r>
           </a:p>
         </p:txBody>
@@ -6131,7 +6131,7 @@
                 </a:solidFill>
                 <a:latin typeface="Helvetica"/>
               </a:rPr>
-              <a:t>padj &lt; 0.001 and |log2FC| &gt; 2.5.</a:t>
+              <a:t>pvalue &lt; 0.001 and |log2FC| &gt; 2.5.</a:t>
             </a:r>
           </a:p>
           <a:p>
@@ -6283,7 +6283,7 @@
                 </a:solidFill>
                 <a:latin typeface="Helvetica"/>
               </a:rPr>
-              <a:t>— Those cutoffs keep 48 up and 55 down genes</a:t>
+              <a:t>— Those cutoffs keep 55 up and 56 down genes</a:t>
             </a:r>
           </a:p>
           <a:p>
@@ -6525,7 +6525,7 @@
         <p:spPr>
           <a:xfrm>
             <a:off x="822960" y="4046220"/>
-            <a:ext cx="10545775" cy="1280160"/>
+            <a:ext cx="10545775" cy="280670"/>
           </a:xfrm>
           <a:prstGeom prst="rect">
             <a:avLst/>
@@ -6540,7 +6540,7 @@
           <a:p>
             <a:pPr algn="l">
               <a:spcAft>
-                <a:spcPts val="1000"/>
+                <a:spcPts val="0"/>
               </a:spcAft>
             </a:pPr>
             <a:r>
